--- a/slides/aula-04-criterios-aceite-hipoteses-riscos.pptx
+++ b/slides/aula-04-criterios-aceite-hipoteses-riscos.pptx
@@ -5208,7 +5208,7 @@
                 <a:ea typeface="Calibri" pitchFamily="34" charset="-122"/>
                 <a:cs typeface="Calibri" pitchFamily="34" charset="-120"/>
               </a:rPr>
-              <a:t>Em duplas ou trios — escolham 1 das 3 opções</a:t>
+              <a:t>Em grupo (3 a 5 pessoas) — escolham 1 das 3 opções</a:t>
             </a:r>
             <a:endParaRPr lang="en-US" sz="1300" dirty="0"/>
           </a:p>

--- a/slides/aula-04-criterios-aceite-hipoteses-riscos.pptx
+++ b/slides/aula-04-criterios-aceite-hipoteses-riscos.pptx
@@ -1046,7 +1046,7 @@
           <a:p>
             <a:r>
               <a:rPr lang="en-US" dirty="0"/>
-              <a:t>Correção binária: entregou no prazo e no formato, pontuou.</a:t>
+              <a:t>As três atividades são complementares: a 1 produz, a 2 transforma, a 3 usa e critica IA. Correção binária: entregou as três no prazo e no formato, pontuou.</a:t>
             </a:r>
             <a:endParaRPr lang="en-US" dirty="0"/>
           </a:p>
@@ -5208,7 +5208,7 @@
                 <a:ea typeface="Calibri" pitchFamily="34" charset="-122"/>
                 <a:cs typeface="Calibri" pitchFamily="34" charset="-120"/>
               </a:rPr>
-              <a:t>Em grupo (3 a 5 pessoas) — escolham 1 das 3 opções</a:t>
+              <a:t>Em grupo (3 a 5 pessoas) — as três atividades, na ordem</a:t>
             </a:r>
             <a:endParaRPr lang="en-US" sz="1300" dirty="0"/>
           </a:p>
@@ -5622,7 +5622,7 @@
                 <a:ea typeface="Calibri" pitchFamily="34" charset="-122"/>
                 <a:cs typeface="Calibri" pitchFamily="34" charset="-120"/>
               </a:rPr>
-              <a:t>Entrega ao final do encontro · vale 0,25</a:t>
+              <a:t>As três, entregues ao final do encontro · valem 0,25</a:t>
             </a:r>
             <a:endParaRPr lang="en-US" sz="1000" dirty="0"/>
           </a:p>
